--- a/course/高校实验室安全/课件/007_准入、培训与离岗交接.pptx
+++ b/course/高校实验室安全/课件/007_准入、培训与离岗交接.pptx
@@ -535,12 +535,6 @@
               <a:t>取得准入后，进出实验室要按规定登记，听从实验室负责人和指导教师的安排。新实验开展前还要先做风险评估、确定防护措施（第 2 章讲解）。</a:t>
             </a:r>
           </a:p>
-          <a:p/>
-          <a:p>
-            <a:r>
-              <a:t>来源：合并了 15 个原知识点，最佳讲解取自 Acids, Bases &amp; Solvents Safety 11（详见 来源.tsv）</a:t>
-            </a:r>
-          </a:p>
         </p:txBody>
       </p:sp>
       <p:sp>
@@ -611,12 +605,6 @@
               <a:t>准入培训不是一劳永逸的。出现下列情况时，要先补专项培训再操作：更换课题或开展新的实验，使用此前没有用过的设备或危险物质，操作规程修订改版，从低风险实验转入高风险实验。必要时还要重新进行风险评估和实操考核。</a:t>
             </a:r>
           </a:p>
-          <a:p/>
-          <a:p>
-            <a:r>
-              <a:t>来源：合并了 2 个原知识点，最佳讲解取自 Microbiology Biosafety 46（详见 来源.tsv）</a:t>
-            </a:r>
-          </a:p>
         </p:txBody>
       </p:sp>
       <p:sp>
@@ -692,12 +680,6 @@
               <a:t>所有人员都要定期复训，有经验的老手也不例外，规程更新时更要及时学习；同时定期参加应急演练，保持应急处置能力。复训周期以本校和本实验室规定为准。</a:t>
             </a:r>
           </a:p>
-          <a:p/>
-          <a:p>
-            <a:r>
-              <a:t>来源：合并了 2 个原知识点，最佳讲解取自 Microbiology Biosafety 39（详见 来源.tsv）</a:t>
-            </a:r>
-          </a:p>
         </p:txBody>
       </p:sp>
       <p:sp>
@@ -773,12 +755,6 @@
               <a:t>培训记录要归档保存，并跟踪复训到期时间，及时提醒。好的培训记录能证明人员真正掌握了内容，而不只是签过到。</a:t>
             </a:r>
           </a:p>
-          <a:p/>
-          <a:p>
-            <a:r>
-              <a:t>来源：合并了 1 个原知识点，最佳讲解取自 BIORISK MANAGEMENT 29（详见 来源.tsv）</a:t>
-            </a:r>
-          </a:p>
         </p:txBody>
       </p:sp>
       <p:sp>
@@ -849,12 +825,6 @@
               <a:t>本课程各节讲的是通用的安全知识和原则，是打基础的。每个实验室的设施、设备、物质和管理要求不同，具体的操作方法和要求一律以本实验室的安全操作规程、安全手册和负责人的指导为准。课程内容与本实验室规程不一致时，以本实验室规程和本校规定为准，并可向负责人反映。</a:t>
             </a:r>
           </a:p>
-          <a:p/>
-          <a:p>
-            <a:r>
-              <a:t>来源：合并了 15 个原知识点，最佳讲解取自 CDC Laboratory Safety Series 01（详见 来源.tsv）</a:t>
-            </a:r>
-          </a:p>
         </p:txBody>
       </p:sp>
       <p:sp>
@@ -930,12 +900,6 @@
               <a:t>无主样本和试剂是实验室常见的隐患来源：标签模糊、性质不明，处置困难，甚至可能变质产生危险。离开时办好交接，是对实验室和后来者负责。</a:t>
             </a:r>
           </a:p>
-          <a:p/>
-          <a:p>
-            <a:r>
-              <a:t>来源：合并了 1 个原知识点，最佳讲解取自 BIORISK MANAGEMENT 30（详见 来源.tsv）</a:t>
-            </a:r>
-          </a:p>
         </p:txBody>
       </p:sp>
       <p:sp>
@@ -1236,12 +1200,6 @@
               <a:t>三层培训缺一不可：学校和学院的培训打基础，实验室的培训解决“在这间屋子里、做这个实验具体怎么做”。生物安全、辐射、激光等专项培训分别见第 61、93、116 课。</a:t>
             </a:r>
           </a:p>
-          <a:p/>
-          <a:p>
-            <a:r>
-              <a:t>来源：合并了 1 个原知识点，最佳讲解取自 Microbiology Biosafety 46（详见 来源.tsv）</a:t>
-            </a:r>
-          </a:p>
         </p:txBody>
       </p:sp>
       <p:sp>
@@ -1317,12 +1275,6 @@
               <a:t>同样，实验室准备引入一种新的危险化学品或开展新的危险性工作时，如果相应的操作规程还没有制定、人员培训还没有完成，就不能使用，也不能先储存这种化学品。</a:t>
             </a:r>
           </a:p>
-          <a:p/>
-          <a:p>
-            <a:r>
-              <a:t>来源：合并了 3 个原知识点，最佳讲解取自 BIORISK MANAGEMENT 29（详见 来源.tsv）</a:t>
-            </a:r>
-          </a:p>
         </p:txBody>
       </p:sp>
       <p:sp>
@@ -1403,12 +1355,6 @@
               <a:t>没有经过培训就上手操作，是事故和伤害的常见原因。</a:t>
             </a:r>
           </a:p>
-          <a:p/>
-          <a:p>
-            <a:r>
-              <a:t>来源：合并了 6 个原知识点，最佳讲解取自 Lab Safety Training - Essential Protocols 04（详见 来源.tsv）</a:t>
-            </a:r>
-          </a:p>
         </p:txBody>
       </p:sp>
       <p:sp>
@@ -1484,12 +1430,6 @@
               <a:t>培训应当按需设计：先分析不同人员需要什么（新生、老生、教师、维修人员需求不同），据此确定内容和方式；培训后通过考核、实操和日常观察检验效果，并定期再培训。对带教人来说，教别人的过程也是巩固自己的过程。</a:t>
             </a:r>
           </a:p>
-          <a:p/>
-          <a:p>
-            <a:r>
-              <a:t>来源：合并了 4 个原知识点，最佳讲解取自 Lab Safety Training - Essential Protocols 08（详见 来源.tsv）</a:t>
-            </a:r>
-          </a:p>
         </p:txBody>
       </p:sp>
       <p:sp>
@@ -1565,12 +1505,6 @@
               <a:t>过程中有任何疑问随时提出，不要硬着头皮上。危险性较高的操作（如使用剧毒品、高压、自燃试剂等）不得一个人在实验室进行，要有人在场或按本校规定执行。</a:t>
             </a:r>
           </a:p>
-          <a:p/>
-          <a:p>
-            <a:r>
-              <a:t>来源：合并了 4 个原知识点，最佳讲解取自 Microbiology Biosafety 46（详见 来源.tsv）</a:t>
-            </a:r>
-          </a:p>
         </p:txBody>
       </p:sp>
       <p:sp>
@@ -1651,12 +1585,6 @@
               <a:t>就像熟悉灯开关在哪里一样，第一天就要学会这里的安全规则。看不懂的随时问负责人和安全员。</a:t>
             </a:r>
           </a:p>
-          <a:p/>
-          <a:p>
-            <a:r>
-              <a:t>来源：合并了 6 个原知识点，最佳讲解取自 CDC Laboratory Safety Series 02（详见 来源.tsv）</a:t>
-            </a:r>
-          </a:p>
         </p:txBody>
       </p:sp>
       <p:sp>
@@ -1727,12 +1655,6 @@
               <a:t>新人入门可以记住六件事：一是知道自己要用哪些物质和设备；二是知道化学品安全技术说明书（SDS）和实验室安全手册放在哪里，随时可查；三是知道需要什么防护、怎样正确使用；四是使用设备前先检查状态是否正常；五是保持台面整洁有序；六是知道出了事怎么应急。最后，听从实验室负责人的安排，遵守规矩，才能天天安全。</a:t>
             </a:r>
           </a:p>
-          <a:p/>
-          <a:p>
-            <a:r>
-              <a:t>来源：合并了 2 个原知识点，最佳讲解取自 Fire Safety &amp; Extinguisher Training 09（详见 来源.tsv）</a:t>
-            </a:r>
-          </a:p>
         </p:txBody>
       </p:sp>
       <p:sp>
@@ -1806,12 +1728,6 @@
           <a:p>
             <a:r>
               <a:t>应急技能要定期复习；没有经过培训的人员，在火情面前首先要确保自身安全、及时报警（119）和撤离。</a:t>
-            </a:r>
-          </a:p>
-          <a:p/>
-          <a:p>
-            <a:r>
-              <a:t>来源：合并了 2 个原知识点，最佳讲解取自 Fire Safety &amp; Extinguisher Training 09（详见 来源.tsv）</a:t>
             </a:r>
           </a:p>
         </p:txBody>
